--- a/assets/TCS302/Unit-1/Lecture8_All_Stack_Functions_in_C.pptx
+++ b/assets/TCS302/Unit-1/Lecture8_All_Stack_Functions_in_C.pptx
@@ -2646,64 +2646,6 @@
                 <a:cs typeface="Consolas"/>
               </a:rPr>
               <a:t>init • isEmpty • isFull • size • push • pop • peek • clear • display</a:t>
-            </a:r>
-          </a:p>
-        </p:txBody>
-      </p:sp>
-      <p:sp>
-        <p:nvSpPr>
-          <p:cNvPr id="9" name="format-note">
-            <a:extLst>
-              <a:ext uri="{FF2B5EF4-FFF2-40B4-BE49-F238E27FC236}">
-                <a16:creationId xmlns:a16="http://schemas.microsoft.com/office/drawing/2014/main" id="{EF64336B-396E-456F-B927-98271541144F}"/>
-              </a:ext>
-            </a:extLst>
-          </p:cNvPr>
-          <p:cNvSpPr>
-            <a:spLocks noGrp="1"/>
-          </p:cNvSpPr>
-          <p:nvPr/>
-        </p:nvSpPr>
-        <p:spPr>
-          <a:xfrm>
-            <a:off x="800100" y="6076950"/>
-            <a:ext cx="4572000" cy="266700"/>
-          </a:xfrm>
-          <a:prstGeom prst="rect">
-            <a:avLst/>
-          </a:prstGeom>
-          <a:noFill/>
-          <a:ln w="0">
-            <a:noFill/>
-            <a:prstDash val="solid"/>
-          </a:ln>
-        </p:spPr>
-        <p:txBody>
-          <a:bodyPr wrap="square" lIns="19050" tIns="9525" rIns="19050" bIns="9525" anchor="ctr">
-            <a:noAutofit/>
-          </a:bodyPr>
-          <a:lstStyle/>
-          <a:p>
-            <a:pPr algn="l">
-              <a:defRPr sz="1650" b="0">
-                <a:solidFill>
-                  <a:srgbClr val="566B78"/>
-                </a:solidFill>
-                <a:latin typeface="Aptos"/>
-                <a:ea typeface="Aptos"/>
-                <a:cs typeface="Aptos"/>
-              </a:defRPr>
-            </a:pPr>
-            <a:r>
-              <a:rPr sz="1650" b="0">
-                <a:solidFill>
-                  <a:srgbClr val="566B78"/>
-                </a:solidFill>
-                <a:latin typeface="Aptos"/>
-                <a:ea typeface="Aptos"/>
-                <a:cs typeface="Aptos"/>
-              </a:rPr>
-              <a:t>Editable code and shapes only</a:t>
             </a:r>
           </a:p>
         </p:txBody>
